--- a/03-build/pptx/C4_U5_docente.pptx
+++ b/03-build/pptx/C4_U5_docente.pptx
@@ -4737,7 +4737,6 @@
               <a:srgbClr val="D64550"/>
             </a:solidFill>
           </a:ln>
-          <a:effectLst/>
           <a:effectLst>
             <a:outerShdw blurRad="90000" dist="38000" dir="5400000" rotWithShape="0">
               <a:srgbClr val="20242E">
@@ -4925,7 +4924,6 @@
               <a:srgbClr val="E4E3DE"/>
             </a:solidFill>
           </a:ln>
-          <a:effectLst/>
           <a:effectLst>
             <a:outerShdw blurRad="90000" dist="38000" dir="5400000" rotWithShape="0">
               <a:srgbClr val="20242E">
@@ -5650,7 +5648,6 @@
               <a:srgbClr val="E4E3DE"/>
             </a:solidFill>
           </a:ln>
-          <a:effectLst/>
           <a:effectLst>
             <a:outerShdw blurRad="90000" dist="38000" dir="5400000" rotWithShape="0">
               <a:srgbClr val="20242E">
@@ -5794,7 +5791,6 @@
               <a:srgbClr val="E4E3DE"/>
             </a:solidFill>
           </a:ln>
-          <a:effectLst/>
           <a:effectLst>
             <a:outerShdw blurRad="90000" dist="38000" dir="5400000" rotWithShape="0">
               <a:srgbClr val="20242E">
@@ -5938,7 +5934,6 @@
               <a:srgbClr val="E4E3DE"/>
             </a:solidFill>
           </a:ln>
-          <a:effectLst/>
           <a:effectLst>
             <a:outerShdw blurRad="90000" dist="38000" dir="5400000" rotWithShape="0">
               <a:srgbClr val="20242E">
@@ -6082,7 +6077,6 @@
               <a:srgbClr val="E4E3DE"/>
             </a:solidFill>
           </a:ln>
-          <a:effectLst/>
           <a:effectLst>
             <a:outerShdw blurRad="90000" dist="38000" dir="5400000" rotWithShape="0">
               <a:srgbClr val="20242E">
@@ -6226,7 +6220,6 @@
               <a:srgbClr val="E4E3DE"/>
             </a:solidFill>
           </a:ln>
-          <a:effectLst/>
           <a:effectLst>
             <a:outerShdw blurRad="90000" dist="38000" dir="5400000" rotWithShape="0">
               <a:srgbClr val="20242E">
@@ -6370,7 +6363,6 @@
               <a:srgbClr val="E4E3DE"/>
             </a:solidFill>
           </a:ln>
-          <a:effectLst/>
           <a:effectLst>
             <a:outerShdw blurRad="90000" dist="38000" dir="5400000" rotWithShape="0">
               <a:srgbClr val="20242E">
@@ -6514,7 +6506,6 @@
               <a:srgbClr val="D64550"/>
             </a:solidFill>
           </a:ln>
-          <a:effectLst/>
           <a:effectLst>
             <a:outerShdw blurRad="90000" dist="38000" dir="5400000" rotWithShape="0">
               <a:srgbClr val="20242E">
@@ -7151,7 +7142,6 @@
               <a:srgbClr val="D64550"/>
             </a:solidFill>
           </a:ln>
-          <a:effectLst/>
           <a:effectLst>
             <a:outerShdw blurRad="90000" dist="38000" dir="5400000" rotWithShape="0">
               <a:srgbClr val="20242E">
@@ -7411,7 +7401,6 @@
               <a:srgbClr val="D64550"/>
             </a:solidFill>
           </a:ln>
-          <a:effectLst/>
           <a:effectLst>
             <a:outerShdw blurRad="90000" dist="38000" dir="5400000" rotWithShape="0">
               <a:srgbClr val="20242E">
@@ -8190,7 +8179,6 @@
               <a:srgbClr val="E4E3DE"/>
             </a:solidFill>
           </a:ln>
-          <a:effectLst/>
           <a:effectLst>
             <a:outerShdw blurRad="90000" dist="38000" dir="5400000" rotWithShape="0">
               <a:srgbClr val="20242E">
@@ -8344,7 +8332,6 @@
               <a:srgbClr val="E4E3DE"/>
             </a:solidFill>
           </a:ln>
-          <a:effectLst/>
           <a:effectLst>
             <a:outerShdw blurRad="90000" dist="38000" dir="5400000" rotWithShape="0">
               <a:srgbClr val="20242E">
@@ -8498,7 +8485,6 @@
               <a:srgbClr val="E4E3DE"/>
             </a:solidFill>
           </a:ln>
-          <a:effectLst/>
           <a:effectLst>
             <a:outerShdw blurRad="90000" dist="38000" dir="5400000" rotWithShape="0">
               <a:srgbClr val="20242E">
@@ -8652,7 +8638,6 @@
               <a:srgbClr val="E4E3DE"/>
             </a:solidFill>
           </a:ln>
-          <a:effectLst/>
           <a:effectLst>
             <a:outerShdw blurRad="90000" dist="38000" dir="5400000" rotWithShape="0">
               <a:srgbClr val="20242E">
@@ -8806,7 +8791,6 @@
               <a:srgbClr val="E4E3DE"/>
             </a:solidFill>
           </a:ln>
-          <a:effectLst/>
           <a:effectLst>
             <a:outerShdw blurRad="90000" dist="38000" dir="5400000" rotWithShape="0">
               <a:srgbClr val="20242E">
@@ -8960,7 +8944,6 @@
               <a:srgbClr val="E4E3DE"/>
             </a:solidFill>
           </a:ln>
-          <a:effectLst/>
           <a:effectLst>
             <a:outerShdw blurRad="90000" dist="38000" dir="5400000" rotWithShape="0">
               <a:srgbClr val="20242E">
@@ -9114,7 +9097,6 @@
               <a:srgbClr val="E4E3DE"/>
             </a:solidFill>
           </a:ln>
-          <a:effectLst/>
           <a:effectLst>
             <a:outerShdw blurRad="90000" dist="38000" dir="5400000" rotWithShape="0">
               <a:srgbClr val="20242E">
@@ -9268,7 +9250,6 @@
               <a:srgbClr val="E4E3DE"/>
             </a:solidFill>
           </a:ln>
-          <a:effectLst/>
           <a:effectLst>
             <a:outerShdw blurRad="90000" dist="38000" dir="5400000" rotWithShape="0">
               <a:srgbClr val="20242E">
@@ -9422,7 +9403,6 @@
               <a:srgbClr val="E4E3DE"/>
             </a:solidFill>
           </a:ln>
-          <a:effectLst/>
           <a:effectLst>
             <a:outerShdw blurRad="90000" dist="38000" dir="5400000" rotWithShape="0">
               <a:srgbClr val="20242E">
@@ -9576,7 +9556,6 @@
               <a:srgbClr val="E4E3DE"/>
             </a:solidFill>
           </a:ln>
-          <a:effectLst/>
           <a:effectLst>
             <a:outerShdw blurRad="90000" dist="38000" dir="5400000" rotWithShape="0">
               <a:srgbClr val="20242E">
@@ -9730,7 +9709,6 @@
               <a:srgbClr val="D64550"/>
             </a:solidFill>
           </a:ln>
-          <a:effectLst/>
           <a:effectLst>
             <a:outerShdw blurRad="90000" dist="38000" dir="5400000" rotWithShape="0">
               <a:srgbClr val="20242E">
@@ -9884,7 +9862,6 @@
               <a:srgbClr val="D64550"/>
             </a:solidFill>
           </a:ln>
-          <a:effectLst/>
           <a:effectLst>
             <a:outerShdw blurRad="90000" dist="38000" dir="5400000" rotWithShape="0">
               <a:srgbClr val="20242E">
@@ -10521,7 +10498,6 @@
               <a:srgbClr val="E4E3DE"/>
             </a:solidFill>
           </a:ln>
-          <a:effectLst/>
           <a:effectLst>
             <a:outerShdw blurRad="90000" dist="38000" dir="5400000" rotWithShape="0">
               <a:srgbClr val="20242E">
@@ -10775,7 +10751,6 @@
               <a:srgbClr val="D64550"/>
             </a:solidFill>
           </a:ln>
-          <a:effectLst/>
           <a:effectLst>
             <a:outerShdw blurRad="90000" dist="38000" dir="5400000" rotWithShape="0">
               <a:srgbClr val="20242E">
@@ -12181,7 +12156,6 @@
               <a:srgbClr val="E4E3DE"/>
             </a:solidFill>
           </a:ln>
-          <a:effectLst/>
           <a:effectLst>
             <a:outerShdw blurRad="90000" dist="38000" dir="5400000" rotWithShape="0">
               <a:srgbClr val="20242E">
@@ -12350,7 +12324,6 @@
               <a:srgbClr val="E4E3DE"/>
             </a:solidFill>
           </a:ln>
-          <a:effectLst/>
           <a:effectLst>
             <a:outerShdw blurRad="90000" dist="38000" dir="5400000" rotWithShape="0">
               <a:srgbClr val="20242E">
@@ -12519,7 +12492,6 @@
               <a:srgbClr val="E4E3DE"/>
             </a:solidFill>
           </a:ln>
-          <a:effectLst/>
           <a:effectLst>
             <a:outerShdw blurRad="90000" dist="38000" dir="5400000" rotWithShape="0">
               <a:srgbClr val="20242E">
@@ -12688,7 +12660,6 @@
               <a:srgbClr val="E4E3DE"/>
             </a:solidFill>
           </a:ln>
-          <a:effectLst/>
           <a:effectLst>
             <a:outerShdw blurRad="90000" dist="38000" dir="5400000" rotWithShape="0">
               <a:srgbClr val="20242E">
@@ -12857,7 +12828,6 @@
               <a:srgbClr val="E4E3DE"/>
             </a:solidFill>
           </a:ln>
-          <a:effectLst/>
           <a:effectLst>
             <a:outerShdw blurRad="90000" dist="38000" dir="5400000" rotWithShape="0">
               <a:srgbClr val="20242E">
@@ -13026,7 +12996,6 @@
               <a:srgbClr val="E4E3DE"/>
             </a:solidFill>
           </a:ln>
-          <a:effectLst/>
           <a:effectLst>
             <a:outerShdw blurRad="90000" dist="38000" dir="5400000" rotWithShape="0">
               <a:srgbClr val="20242E">
@@ -13195,7 +13164,6 @@
               <a:srgbClr val="E4E3DE"/>
             </a:solidFill>
           </a:ln>
-          <a:effectLst/>
           <a:effectLst>
             <a:outerShdw blurRad="90000" dist="38000" dir="5400000" rotWithShape="0">
               <a:srgbClr val="20242E">
@@ -13364,7 +13332,6 @@
               <a:srgbClr val="E4E3DE"/>
             </a:solidFill>
           </a:ln>
-          <a:effectLst/>
           <a:effectLst>
             <a:outerShdw blurRad="90000" dist="38000" dir="5400000" rotWithShape="0">
               <a:srgbClr val="20242E">
@@ -13533,7 +13500,6 @@
               <a:srgbClr val="E4E3DE"/>
             </a:solidFill>
           </a:ln>
-          <a:effectLst/>
           <a:effectLst>
             <a:outerShdw blurRad="90000" dist="38000" dir="5400000" rotWithShape="0">
               <a:srgbClr val="20242E">
@@ -14282,7 +14248,6 @@
               <a:srgbClr val="E4E3DE"/>
             </a:solidFill>
           </a:ln>
-          <a:effectLst/>
           <a:effectLst>
             <a:outerShdw blurRad="90000" dist="38000" dir="5400000" rotWithShape="0">
               <a:srgbClr val="20242E">
@@ -15137,7 +15102,6 @@
               <a:srgbClr val="D64550"/>
             </a:solidFill>
           </a:ln>
-          <a:effectLst/>
           <a:effectLst>
             <a:outerShdw blurRad="90000" dist="38000" dir="5400000" rotWithShape="0">
               <a:srgbClr val="20242E">
@@ -15886,7 +15850,6 @@
               <a:srgbClr val="E4E3DE"/>
             </a:solidFill>
           </a:ln>
-          <a:effectLst/>
           <a:effectLst>
             <a:outerShdw blurRad="90000" dist="38000" dir="5400000" rotWithShape="0">
               <a:srgbClr val="20242E">
@@ -16097,7 +16060,6 @@
               <a:srgbClr val="E4E3DE"/>
             </a:solidFill>
           </a:ln>
-          <a:effectLst/>
           <a:effectLst>
             <a:outerShdw blurRad="90000" dist="38000" dir="5400000" rotWithShape="0">
               <a:srgbClr val="20242E">
@@ -16308,7 +16270,6 @@
               <a:srgbClr val="D64550"/>
             </a:solidFill>
           </a:ln>
-          <a:effectLst/>
           <a:effectLst>
             <a:outerShdw blurRad="90000" dist="38000" dir="5400000" rotWithShape="0">
               <a:srgbClr val="20242E">
@@ -17206,7 +17167,6 @@
               <a:srgbClr val="E4E3DE"/>
             </a:solidFill>
           </a:ln>
-          <a:effectLst/>
           <a:effectLst>
             <a:outerShdw blurRad="90000" dist="38000" dir="5400000" rotWithShape="0">
               <a:srgbClr val="20242E">
@@ -17576,7 +17536,6 @@
               <a:srgbClr val="E4E3DE"/>
             </a:solidFill>
           </a:ln>
-          <a:effectLst/>
           <a:effectLst>
             <a:outerShdw blurRad="90000" dist="38000" dir="5400000" rotWithShape="0">
               <a:srgbClr val="20242E">
@@ -17946,7 +17905,6 @@
               <a:srgbClr val="E4E3DE"/>
             </a:solidFill>
           </a:ln>
-          <a:effectLst/>
           <a:effectLst>
             <a:outerShdw blurRad="90000" dist="38000" dir="5400000" rotWithShape="0">
               <a:srgbClr val="20242E">
@@ -18844,7 +18802,6 @@
               <a:srgbClr val="D64550"/>
             </a:solidFill>
           </a:ln>
-          <a:effectLst/>
           <a:effectLst>
             <a:outerShdw blurRad="90000" dist="38000" dir="5400000" rotWithShape="0">
               <a:srgbClr val="20242E">
@@ -19214,7 +19171,6 @@
               <a:srgbClr val="E4E3DE"/>
             </a:solidFill>
           </a:ln>
-          <a:effectLst/>
           <a:effectLst>
             <a:outerShdw blurRad="90000" dist="38000" dir="5400000" rotWithShape="0">
               <a:srgbClr val="20242E">
@@ -20666,7 +20622,6 @@
               <a:srgbClr val="E4E3DE"/>
             </a:solidFill>
           </a:ln>
-          <a:effectLst/>
           <a:effectLst>
             <a:outerShdw blurRad="90000" dist="38000" dir="5400000" rotWithShape="0">
               <a:srgbClr val="20242E">
@@ -20955,7 +20910,6 @@
               <a:srgbClr val="E4E3DE"/>
             </a:solidFill>
           </a:ln>
-          <a:effectLst/>
           <a:effectLst>
             <a:outerShdw blurRad="90000" dist="38000" dir="5400000" rotWithShape="0">
               <a:srgbClr val="20242E">
@@ -21298,7 +21252,6 @@
               <a:srgbClr val="D64550"/>
             </a:solidFill>
           </a:ln>
-          <a:effectLst/>
           <a:effectLst>
             <a:outerShdw blurRad="90000" dist="38000" dir="5400000" rotWithShape="0">
               <a:srgbClr val="20242E">
@@ -22411,7 +22364,6 @@
               <a:srgbClr val="E4E3DE"/>
             </a:solidFill>
           </a:ln>
-          <a:effectLst/>
           <a:effectLst>
             <a:outerShdw blurRad="90000" dist="38000" dir="5400000" rotWithShape="0">
               <a:srgbClr val="20242E">
@@ -22555,7 +22507,6 @@
               <a:srgbClr val="E4E3DE"/>
             </a:solidFill>
           </a:ln>
-          <a:effectLst/>
           <a:effectLst>
             <a:outerShdw blurRad="90000" dist="38000" dir="5400000" rotWithShape="0">
               <a:srgbClr val="20242E">
@@ -22699,7 +22650,6 @@
               <a:srgbClr val="E4E3DE"/>
             </a:solidFill>
           </a:ln>
-          <a:effectLst/>
           <a:effectLst>
             <a:outerShdw blurRad="90000" dist="38000" dir="5400000" rotWithShape="0">
               <a:srgbClr val="20242E">
@@ -23524,7 +23474,6 @@
               <a:srgbClr val="E4E3DE"/>
             </a:solidFill>
           </a:ln>
-          <a:effectLst/>
           <a:effectLst>
             <a:outerShdw blurRad="90000" dist="38000" dir="5400000" rotWithShape="0">
               <a:srgbClr val="20242E">
